--- a/docs/presentation.pptx
+++ b/docs/presentation.pptx
@@ -17,12 +17,14 @@
     <p:sldId id="267" r:id="rId12"/>
     <p:sldId id="269" r:id="rId13"/>
     <p:sldId id="268" r:id="rId14"/>
-    <p:sldId id="270" r:id="rId15"/>
-    <p:sldId id="265" r:id="rId16"/>
-    <p:sldId id="272" r:id="rId17"/>
-    <p:sldId id="271" r:id="rId18"/>
-    <p:sldId id="273" r:id="rId19"/>
-    <p:sldId id="274" r:id="rId20"/>
+    <p:sldId id="276" r:id="rId15"/>
+    <p:sldId id="270" r:id="rId16"/>
+    <p:sldId id="265" r:id="rId17"/>
+    <p:sldId id="272" r:id="rId18"/>
+    <p:sldId id="275" r:id="rId19"/>
+    <p:sldId id="271" r:id="rId20"/>
+    <p:sldId id="273" r:id="rId21"/>
+    <p:sldId id="274" r:id="rId22"/>
   </p:sldIdLst>
   <p:sldSz cx="12192000" cy="6858000"/>
   <p:notesSz cx="6858000" cy="9144000"/>
@@ -4121,6 +4123,156 @@
                 <a:latin typeface="Times New Roman" panose="02020603050405020304" charset="0"/>
                 <a:cs typeface="Times New Roman" panose="02020603050405020304" charset="0"/>
               </a:rPr>
+              <a:t>Error Analysis</a:t>
+            </a:r>
+            <a:endParaRPr lang="en-US" altLang="en-GB" sz="5200" b="1">
+              <a:solidFill>
+                <a:schemeClr val="tx2">
+                  <a:lumMod val="75000"/>
+                </a:schemeClr>
+              </a:solidFill>
+              <a:latin typeface="Times New Roman" panose="02020603050405020304" charset="0"/>
+              <a:cs typeface="Times New Roman" panose="02020603050405020304" charset="0"/>
+            </a:endParaRPr>
+          </a:p>
+        </p:txBody>
+      </p:sp>
+      <p:sp>
+        <p:nvSpPr>
+          <p:cNvPr id="3" name="Content Placeholder 2"/>
+          <p:cNvSpPr>
+            <a:spLocks noGrp="1"/>
+          </p:cNvSpPr>
+          <p:nvPr>
+            <p:ph idx="1"/>
+          </p:nvPr>
+        </p:nvSpPr>
+        <p:spPr>
+          <a:xfrm>
+            <a:off x="838200" y="1825625"/>
+            <a:ext cx="10515600" cy="3348355"/>
+          </a:xfrm>
+        </p:spPr>
+        <p:txBody>
+          <a:bodyPr anchor="ctr" anchorCtr="0"/>
+          <a:p>
+            <a:pPr marL="0" indent="0">
+              <a:lnSpc>
+                <a:spcPct val="150000"/>
+              </a:lnSpc>
+              <a:buNone/>
+            </a:pPr>
+            <a:r>
+              <a:rPr lang="en-US" altLang="en-GB">
+                <a:latin typeface="Times New Roman" panose="02020603050405020304" charset="0"/>
+                <a:cs typeface="Times New Roman" panose="02020603050405020304" charset="0"/>
+              </a:rPr>
+              <a:t>Error analysis based on best historical model (XGBoost Bayesian)</a:t>
+            </a:r>
+            <a:endParaRPr lang="en-US" altLang="en-GB">
+              <a:latin typeface="Times New Roman" panose="02020603050405020304" charset="0"/>
+              <a:cs typeface="Times New Roman" panose="02020603050405020304" charset="0"/>
+            </a:endParaRPr>
+          </a:p>
+          <a:p>
+            <a:pPr>
+              <a:lnSpc>
+                <a:spcPct val="150000"/>
+              </a:lnSpc>
+            </a:pPr>
+            <a:r>
+              <a:rPr lang="en-US" altLang="en-GB">
+                <a:latin typeface="Times New Roman" panose="02020603050405020304" charset="0"/>
+                <a:cs typeface="Times New Roman" panose="02020603050405020304" charset="0"/>
+              </a:rPr>
+              <a:t>Errors concentrated during extreme price events</a:t>
+            </a:r>
+            <a:endParaRPr lang="en-US" altLang="en-GB">
+              <a:latin typeface="Times New Roman" panose="02020603050405020304" charset="0"/>
+              <a:cs typeface="Times New Roman" panose="02020603050405020304" charset="0"/>
+            </a:endParaRPr>
+          </a:p>
+          <a:p>
+            <a:pPr>
+              <a:lnSpc>
+                <a:spcPct val="150000"/>
+              </a:lnSpc>
+            </a:pPr>
+            <a:r>
+              <a:rPr lang="en-US" altLang="en-GB">
+                <a:latin typeface="Times New Roman" panose="02020603050405020304" charset="0"/>
+                <a:cs typeface="Times New Roman" panose="02020603050405020304" charset="0"/>
+              </a:rPr>
+              <a:t>Model underestimates sharp spikes</a:t>
+            </a:r>
+            <a:endParaRPr lang="en-US" altLang="en-GB">
+              <a:latin typeface="Times New Roman" panose="02020603050405020304" charset="0"/>
+              <a:cs typeface="Times New Roman" panose="02020603050405020304" charset="0"/>
+            </a:endParaRPr>
+          </a:p>
+          <a:p>
+            <a:pPr>
+              <a:lnSpc>
+                <a:spcPct val="150000"/>
+              </a:lnSpc>
+            </a:pPr>
+            <a:r>
+              <a:rPr lang="en-US" altLang="en-GB">
+                <a:latin typeface="Times New Roman" panose="02020603050405020304" charset="0"/>
+                <a:cs typeface="Times New Roman" panose="02020603050405020304" charset="0"/>
+              </a:rPr>
+              <a:t>Performance depends on volatility level</a:t>
+            </a:r>
+            <a:endParaRPr lang="en-US" altLang="en-GB">
+              <a:latin typeface="Times New Roman" panose="02020603050405020304" charset="0"/>
+              <a:cs typeface="Times New Roman" panose="02020603050405020304" charset="0"/>
+            </a:endParaRPr>
+          </a:p>
+        </p:txBody>
+      </p:sp>
+    </p:spTree>
+  </p:cSld>
+  <p:clrMapOvr>
+    <a:masterClrMapping/>
+  </p:clrMapOvr>
+</p:sld>
+</file>
+
+<file path=ppt/slides/slide14.xml><?xml version="1.0" encoding="utf-8"?>
+<p:sld xmlns:a="http://schemas.openxmlformats.org/drawingml/2006/main" xmlns:r="http://schemas.openxmlformats.org/officeDocument/2006/relationships" xmlns:p="http://schemas.openxmlformats.org/presentationml/2006/main">
+  <p:cSld>
+    <p:spTree>
+      <p:nvGrpSpPr>
+        <p:cNvPr id="1" name=""/>
+        <p:cNvGrpSpPr/>
+        <p:nvPr/>
+      </p:nvGrpSpPr>
+      <p:grpSpPr/>
+      <p:sp>
+        <p:nvSpPr>
+          <p:cNvPr id="2" name="Title 1"/>
+          <p:cNvSpPr>
+            <a:spLocks noGrp="1"/>
+          </p:cNvSpPr>
+          <p:nvPr>
+            <p:ph type="title"/>
+          </p:nvPr>
+        </p:nvSpPr>
+        <p:spPr/>
+        <p:txBody>
+          <a:bodyPr/>
+          <a:p>
+            <a:pPr algn="ctr"/>
+            <a:r>
+              <a:rPr lang="en-US" altLang="en-GB" sz="5200" b="1">
+                <a:solidFill>
+                  <a:schemeClr val="tx2">
+                    <a:lumMod val="75000"/>
+                  </a:schemeClr>
+                </a:solidFill>
+                <a:latin typeface="Times New Roman" panose="02020603050405020304" charset="0"/>
+                <a:cs typeface="Times New Roman" panose="02020603050405020304" charset="0"/>
+              </a:rPr>
               <a:t>Final Forecast: 10 Feb 2026</a:t>
             </a:r>
             <a:endParaRPr lang="en-US" altLang="en-GB" sz="5200" b="1">
@@ -4169,7 +4321,7 @@
 </p:sld>
 </file>
 
-<file path=ppt/slides/slide14.xml><?xml version="1.0" encoding="utf-8"?>
+<file path=ppt/slides/slide15.xml><?xml version="1.0" encoding="utf-8"?>
 <p:sld xmlns:a="http://schemas.openxmlformats.org/drawingml/2006/main" xmlns:r="http://schemas.openxmlformats.org/officeDocument/2006/relationships" xmlns:p="http://schemas.openxmlformats.org/presentationml/2006/main">
   <p:cSld>
     <p:spTree>
@@ -4491,7 +4643,7 @@
 </p:sld>
 </file>
 
-<file path=ppt/slides/slide15.xml><?xml version="1.0" encoding="utf-8"?>
+<file path=ppt/slides/slide16.xml><?xml version="1.0" encoding="utf-8"?>
 <p:sld xmlns:a="http://schemas.openxmlformats.org/drawingml/2006/main" xmlns:r="http://schemas.openxmlformats.org/officeDocument/2006/relationships" xmlns:p="http://schemas.openxmlformats.org/presentationml/2006/main">
   <p:cSld>
     <p:spTree>
@@ -4535,198 +4687,6 @@
 </p:sld>
 </file>
 
-<file path=ppt/slides/slide16.xml><?xml version="1.0" encoding="utf-8"?>
-<p:sld xmlns:a="http://schemas.openxmlformats.org/drawingml/2006/main" xmlns:r="http://schemas.openxmlformats.org/officeDocument/2006/relationships" xmlns:p="http://schemas.openxmlformats.org/presentationml/2006/main">
-  <p:cSld>
-    <p:spTree>
-      <p:nvGrpSpPr>
-        <p:cNvPr id="1" name=""/>
-        <p:cNvGrpSpPr/>
-        <p:nvPr/>
-      </p:nvGrpSpPr>
-      <p:grpSpPr/>
-      <p:sp>
-        <p:nvSpPr>
-          <p:cNvPr id="2" name="Title 1"/>
-          <p:cNvSpPr>
-            <a:spLocks noGrp="1"/>
-          </p:cNvSpPr>
-          <p:nvPr>
-            <p:ph type="title"/>
-          </p:nvPr>
-        </p:nvSpPr>
-        <p:spPr/>
-        <p:txBody>
-          <a:bodyPr/>
-          <a:p>
-            <a:pPr algn="ctr"/>
-            <a:r>
-              <a:rPr lang="en-US" altLang="en-GB" sz="5200" b="1">
-                <a:solidFill>
-                  <a:schemeClr val="tx2">
-                    <a:lumMod val="75000"/>
-                  </a:schemeClr>
-                </a:solidFill>
-                <a:latin typeface="Times New Roman" panose="02020603050405020304" charset="0"/>
-                <a:cs typeface="Times New Roman" panose="02020603050405020304" charset="0"/>
-              </a:rPr>
-              <a:t>Conclusion</a:t>
-            </a:r>
-            <a:endParaRPr lang="en-US" altLang="en-GB" sz="5200" b="1">
-              <a:solidFill>
-                <a:schemeClr val="tx2">
-                  <a:lumMod val="75000"/>
-                </a:schemeClr>
-              </a:solidFill>
-              <a:latin typeface="Times New Roman" panose="02020603050405020304" charset="0"/>
-              <a:cs typeface="Times New Roman" panose="02020603050405020304" charset="0"/>
-            </a:endParaRPr>
-          </a:p>
-        </p:txBody>
-      </p:sp>
-      <p:sp>
-        <p:nvSpPr>
-          <p:cNvPr id="3" name="Content Placeholder 2"/>
-          <p:cNvSpPr>
-            <a:spLocks noGrp="1"/>
-          </p:cNvSpPr>
-          <p:nvPr>
-            <p:ph idx="1"/>
-          </p:nvPr>
-        </p:nvSpPr>
-        <p:spPr>
-          <a:xfrm>
-            <a:off x="838200" y="1691640"/>
-            <a:ext cx="10515600" cy="4485640"/>
-          </a:xfrm>
-        </p:spPr>
-        <p:txBody>
-          <a:bodyPr anchor="ctr" anchorCtr="0"/>
-          <a:p>
-            <a:pPr>
-              <a:lnSpc>
-                <a:spcPct val="120000"/>
-              </a:lnSpc>
-              <a:spcAft>
-                <a:spcPts val="0"/>
-              </a:spcAft>
-              <a:buFont typeface="Arial" panose="020B0604020202020204" pitchFamily="34" charset="0"/>
-              <a:buChar char="•"/>
-            </a:pPr>
-            <a:r>
-              <a:rPr lang="en-US" altLang="en-GB">
-                <a:latin typeface="Times New Roman" panose="02020603050405020304" charset="0"/>
-                <a:cs typeface="Times New Roman" panose="02020603050405020304" charset="0"/>
-              </a:rPr>
-              <a:t>XGBoost achieved best historical accuracy (MAE ≈ 9.6)</a:t>
-            </a:r>
-            <a:endParaRPr lang="en-US" altLang="en-GB">
-              <a:latin typeface="Times New Roman" panose="02020603050405020304" charset="0"/>
-              <a:cs typeface="Times New Roman" panose="02020603050405020304" charset="0"/>
-            </a:endParaRPr>
-          </a:p>
-          <a:p>
-            <a:pPr>
-              <a:lnSpc>
-                <a:spcPct val="120000"/>
-              </a:lnSpc>
-              <a:spcAft>
-                <a:spcPts val="0"/>
-              </a:spcAft>
-              <a:buFont typeface="Arial" panose="020B0604020202020204" pitchFamily="34" charset="0"/>
-              <a:buChar char="•"/>
-            </a:pPr>
-            <a:r>
-              <a:rPr lang="en-US" altLang="en-GB">
-                <a:latin typeface="Times New Roman" panose="02020603050405020304" charset="0"/>
-                <a:cs typeface="Times New Roman" panose="02020603050405020304" charset="0"/>
-              </a:rPr>
-              <a:t>Strong impact of feature engineering (lags, rolling stats, external variables)</a:t>
-            </a:r>
-            <a:endParaRPr lang="en-US" altLang="en-GB">
-              <a:latin typeface="Times New Roman" panose="02020603050405020304" charset="0"/>
-              <a:cs typeface="Times New Roman" panose="02020603050405020304" charset="0"/>
-            </a:endParaRPr>
-          </a:p>
-          <a:p>
-            <a:pPr>
-              <a:lnSpc>
-                <a:spcPct val="120000"/>
-              </a:lnSpc>
-              <a:spcAft>
-                <a:spcPts val="0"/>
-              </a:spcAft>
-              <a:buFont typeface="Arial" panose="020B0604020202020204" pitchFamily="34" charset="0"/>
-              <a:buChar char="•"/>
-            </a:pPr>
-            <a:r>
-              <a:rPr lang="en-US" altLang="en-GB">
-                <a:latin typeface="Times New Roman" panose="02020603050405020304" charset="0"/>
-                <a:cs typeface="Times New Roman" panose="02020603050405020304" charset="0"/>
-              </a:rPr>
-              <a:t>Electricity prices show clear temporal patterns + high volatility</a:t>
-            </a:r>
-            <a:endParaRPr lang="en-US" altLang="en-GB">
-              <a:latin typeface="Times New Roman" panose="02020603050405020304" charset="0"/>
-              <a:cs typeface="Times New Roman" panose="02020603050405020304" charset="0"/>
-            </a:endParaRPr>
-          </a:p>
-          <a:p>
-            <a:pPr>
-              <a:lnSpc>
-                <a:spcPct val="120000"/>
-              </a:lnSpc>
-              <a:spcAft>
-                <a:spcPts val="0"/>
-              </a:spcAft>
-              <a:buFont typeface="Arial" panose="020B0604020202020204" pitchFamily="34" charset="0"/>
-              <a:buChar char="•"/>
-            </a:pPr>
-            <a:r>
-              <a:rPr lang="en-US" altLang="en-GB">
-                <a:latin typeface="Times New Roman" panose="02020603050405020304" charset="0"/>
-                <a:cs typeface="Times New Roman" panose="02020603050405020304" charset="0"/>
-              </a:rPr>
-              <a:t>In real forecasting, performance drops due to unavailable future inputs</a:t>
-            </a:r>
-            <a:endParaRPr lang="en-US" altLang="en-GB">
-              <a:latin typeface="Times New Roman" panose="02020603050405020304" charset="0"/>
-              <a:cs typeface="Times New Roman" panose="02020603050405020304" charset="0"/>
-            </a:endParaRPr>
-          </a:p>
-          <a:p>
-            <a:pPr>
-              <a:lnSpc>
-                <a:spcPct val="120000"/>
-              </a:lnSpc>
-              <a:spcAft>
-                <a:spcPts val="0"/>
-              </a:spcAft>
-              <a:buFont typeface="Arial" panose="020B0604020202020204" pitchFamily="34" charset="0"/>
-              <a:buChar char="•"/>
-            </a:pPr>
-            <a:r>
-              <a:rPr lang="en-US" altLang="en-GB">
-                <a:latin typeface="Times New Roman" panose="02020603050405020304" charset="0"/>
-                <a:cs typeface="Times New Roman" panose="02020603050405020304" charset="0"/>
-              </a:rPr>
-              <a:t>Prophet provides more realistic forecasts under these constraints</a:t>
-            </a:r>
-            <a:endParaRPr lang="en-US" altLang="en-GB">
-              <a:latin typeface="Times New Roman" panose="02020603050405020304" charset="0"/>
-              <a:cs typeface="Times New Roman" panose="02020603050405020304" charset="0"/>
-            </a:endParaRPr>
-          </a:p>
-        </p:txBody>
-      </p:sp>
-    </p:spTree>
-  </p:cSld>
-  <p:clrMapOvr>
-    <a:masterClrMapping/>
-  </p:clrMapOvr>
-</p:sld>
-</file>
-
 <file path=ppt/slides/slide17.xml><?xml version="1.0" encoding="utf-8"?>
 <p:sld xmlns:a="http://schemas.openxmlformats.org/drawingml/2006/main" xmlns:r="http://schemas.openxmlformats.org/officeDocument/2006/relationships" xmlns:p="http://schemas.openxmlformats.org/presentationml/2006/main">
   <p:cSld>
@@ -4739,45 +4699,6 @@
       <p:grpSpPr/>
       <p:sp>
         <p:nvSpPr>
-          <p:cNvPr id="2" name="Title 1"/>
-          <p:cNvSpPr>
-            <a:spLocks noGrp="1"/>
-          </p:cNvSpPr>
-          <p:nvPr>
-            <p:ph type="title"/>
-          </p:nvPr>
-        </p:nvSpPr>
-        <p:spPr/>
-        <p:txBody>
-          <a:bodyPr/>
-          <a:p>
-            <a:pPr algn="ctr"/>
-            <a:r>
-              <a:rPr lang="en-US" altLang="en-GB" sz="5200" b="1">
-                <a:solidFill>
-                  <a:schemeClr val="tx2">
-                    <a:lumMod val="75000"/>
-                  </a:schemeClr>
-                </a:solidFill>
-                <a:latin typeface="Times New Roman" panose="02020603050405020304" charset="0"/>
-                <a:cs typeface="Times New Roman" panose="02020603050405020304" charset="0"/>
-              </a:rPr>
-              <a:t>Future Work</a:t>
-            </a:r>
-            <a:endParaRPr lang="en-US" altLang="en-GB" sz="5200" b="1">
-              <a:solidFill>
-                <a:schemeClr val="tx2">
-                  <a:lumMod val="75000"/>
-                </a:schemeClr>
-              </a:solidFill>
-              <a:latin typeface="Times New Roman" panose="02020603050405020304" charset="0"/>
-              <a:cs typeface="Times New Roman" panose="02020603050405020304" charset="0"/>
-            </a:endParaRPr>
-          </a:p>
-        </p:txBody>
-      </p:sp>
-      <p:sp>
-        <p:nvSpPr>
           <p:cNvPr id="3" name="Content Placeholder 2"/>
           <p:cNvSpPr>
             <a:spLocks noGrp="1"/>
@@ -4788,27 +4709,43 @@
         </p:nvSpPr>
         <p:spPr>
           <a:xfrm>
-            <a:off x="838200" y="1691005"/>
-            <a:ext cx="10515600" cy="4486275"/>
+            <a:off x="838200" y="986790"/>
+            <a:ext cx="10515600" cy="4370705"/>
           </a:xfrm>
         </p:spPr>
         <p:txBody>
           <a:bodyPr anchor="ctr" anchorCtr="0"/>
           <a:p>
+            <a:pPr marL="0" indent="0">
+              <a:lnSpc>
+                <a:spcPct val="150000"/>
+              </a:lnSpc>
+              <a:buNone/>
+            </a:pPr>
+            <a:r>
+              <a:rPr lang="en-US" altLang="en-GB" b="1">
+                <a:latin typeface="Times New Roman" panose="02020603050405020304" charset="0"/>
+                <a:cs typeface="Times New Roman" panose="02020603050405020304" charset="0"/>
+              </a:rPr>
+              <a:t>Key Insight: </a:t>
+            </a:r>
+            <a:endParaRPr lang="en-US" altLang="en-GB" b="1">
+              <a:latin typeface="Times New Roman" panose="02020603050405020304" charset="0"/>
+              <a:cs typeface="Times New Roman" panose="02020603050405020304" charset="0"/>
+            </a:endParaRPr>
+          </a:p>
+          <a:p>
             <a:pPr>
               <a:lnSpc>
-                <a:spcPct val="120000"/>
+                <a:spcPct val="150000"/>
               </a:lnSpc>
-              <a:spcAft>
-                <a:spcPts val="0"/>
-              </a:spcAft>
             </a:pPr>
             <a:r>
               <a:rPr lang="en-US" altLang="en-GB">
                 <a:latin typeface="Times New Roman" panose="02020603050405020304" charset="0"/>
                 <a:cs typeface="Times New Roman" panose="02020603050405020304" charset="0"/>
               </a:rPr>
-              <a:t>Use forecasted external variables (load, wind, solar)</a:t>
+              <a:t>Best historical model: XGBoost (MAE ≈ 9.6)</a:t>
             </a:r>
             <a:endParaRPr lang="en-US" altLang="en-GB">
               <a:latin typeface="Times New Roman" panose="02020603050405020304" charset="0"/>
@@ -4818,18 +4755,15 @@
           <a:p>
             <a:pPr>
               <a:lnSpc>
-                <a:spcPct val="120000"/>
+                <a:spcPct val="150000"/>
               </a:lnSpc>
-              <a:spcAft>
-                <a:spcPts val="0"/>
-              </a:spcAft>
             </a:pPr>
             <a:r>
               <a:rPr lang="en-US" altLang="en-GB">
                 <a:latin typeface="Times New Roman" panose="02020603050405020304" charset="0"/>
                 <a:cs typeface="Times New Roman" panose="02020603050405020304" charset="0"/>
               </a:rPr>
-              <a:t>Explore hybrid models (ML + time-series)</a:t>
+              <a:t>Best real-world model: Prophet</a:t>
             </a:r>
             <a:endParaRPr lang="en-US" altLang="en-GB">
               <a:latin typeface="Times New Roman" panose="02020603050405020304" charset="0"/>
@@ -4839,60 +4773,15 @@
           <a:p>
             <a:pPr>
               <a:lnSpc>
-                <a:spcPct val="120000"/>
+                <a:spcPct val="150000"/>
               </a:lnSpc>
-              <a:spcAft>
-                <a:spcPts val="0"/>
-              </a:spcAft>
             </a:pPr>
             <a:r>
               <a:rPr lang="en-US" altLang="en-GB">
                 <a:latin typeface="Times New Roman" panose="02020603050405020304" charset="0"/>
                 <a:cs typeface="Times New Roman" panose="02020603050405020304" charset="0"/>
               </a:rPr>
-              <a:t>Improve modeling of price spikes / extreme events</a:t>
-            </a:r>
-            <a:endParaRPr lang="en-US" altLang="en-GB">
-              <a:latin typeface="Times New Roman" panose="02020603050405020304" charset="0"/>
-              <a:cs typeface="Times New Roman" panose="02020603050405020304" charset="0"/>
-            </a:endParaRPr>
-          </a:p>
-          <a:p>
-            <a:pPr>
-              <a:lnSpc>
-                <a:spcPct val="120000"/>
-              </a:lnSpc>
-              <a:spcAft>
-                <a:spcPts val="0"/>
-              </a:spcAft>
-            </a:pPr>
-            <a:r>
-              <a:rPr lang="en-US" altLang="en-GB">
-                <a:latin typeface="Times New Roman" panose="02020603050405020304" charset="0"/>
-                <a:cs typeface="Times New Roman" panose="02020603050405020304" charset="0"/>
-              </a:rPr>
-              <a:t>Incorporate additional signals (weather, imports/exports)</a:t>
-            </a:r>
-            <a:endParaRPr lang="en-US" altLang="en-GB">
-              <a:latin typeface="Times New Roman" panose="02020603050405020304" charset="0"/>
-              <a:cs typeface="Times New Roman" panose="02020603050405020304" charset="0"/>
-            </a:endParaRPr>
-          </a:p>
-          <a:p>
-            <a:pPr>
-              <a:lnSpc>
-                <a:spcPct val="120000"/>
-              </a:lnSpc>
-              <a:spcAft>
-                <a:spcPts val="0"/>
-              </a:spcAft>
-            </a:pPr>
-            <a:r>
-              <a:rPr lang="en-US" altLang="en-GB">
-                <a:latin typeface="Times New Roman" panose="02020603050405020304" charset="0"/>
-                <a:cs typeface="Times New Roman" panose="02020603050405020304" charset="0"/>
-              </a:rPr>
-              <a:t>Try probabilistic forecasting instead of point predictions</a:t>
+              <a:t>Reason: future external data unavailable</a:t>
             </a:r>
             <a:endParaRPr lang="en-US" altLang="en-GB">
               <a:latin typeface="Times New Roman" panose="02020603050405020304" charset="0"/>
@@ -4929,48 +4818,346 @@
             <p:ph type="title"/>
           </p:nvPr>
         </p:nvSpPr>
-        <p:spPr>
-          <a:xfrm>
-            <a:off x="838200" y="2766060"/>
-            <a:ext cx="10515600" cy="1325563"/>
-          </a:xfrm>
-        </p:spPr>
+        <p:spPr/>
         <p:txBody>
           <a:bodyPr/>
           <a:p>
             <a:pPr algn="ctr"/>
             <a:r>
-              <a:rPr lang="en-US" altLang="en-GB" sz="8000" b="1">
+              <a:rPr lang="en-US" altLang="en-GB" sz="5200" b="1">
                 <a:solidFill>
                   <a:schemeClr val="tx2">
                     <a:lumMod val="75000"/>
                   </a:schemeClr>
                 </a:solidFill>
-                <a:effectLst>
-                  <a:outerShdw blurRad="38100" dist="38100" dir="2700000" algn="tl">
-                    <a:srgbClr val="000000">
-                      <a:alpha val="43137"/>
-                    </a:srgbClr>
-                  </a:outerShdw>
-                </a:effectLst>
-                <a:latin typeface="Times New Roman" panose="02020603050405020304" charset="0"/>
-                <a:cs typeface="Times New Roman" panose="02020603050405020304" charset="0"/>
-              </a:rPr>
-              <a:t>Thank You</a:t>
-            </a:r>
-            <a:endParaRPr lang="en-US" altLang="en-GB" sz="8000" b="1">
+                <a:latin typeface="Times New Roman" panose="02020603050405020304" charset="0"/>
+                <a:cs typeface="Times New Roman" panose="02020603050405020304" charset="0"/>
+              </a:rPr>
+              <a:t>Conclusion</a:t>
+            </a:r>
+            <a:endParaRPr lang="en-US" altLang="en-GB" sz="5200" b="1">
               <a:solidFill>
                 <a:schemeClr val="tx2">
                   <a:lumMod val="75000"/>
                 </a:schemeClr>
               </a:solidFill>
-              <a:effectLst>
-                <a:outerShdw blurRad="38100" dist="38100" dir="2700000" algn="tl">
-                  <a:srgbClr val="000000">
-                    <a:alpha val="43137"/>
-                  </a:srgbClr>
-                </a:outerShdw>
-              </a:effectLst>
+              <a:latin typeface="Times New Roman" panose="02020603050405020304" charset="0"/>
+              <a:cs typeface="Times New Roman" panose="02020603050405020304" charset="0"/>
+            </a:endParaRPr>
+          </a:p>
+        </p:txBody>
+      </p:sp>
+      <p:sp>
+        <p:nvSpPr>
+          <p:cNvPr id="3" name="Content Placeholder 2"/>
+          <p:cNvSpPr>
+            <a:spLocks noGrp="1"/>
+          </p:cNvSpPr>
+          <p:nvPr>
+            <p:ph idx="1"/>
+          </p:nvPr>
+        </p:nvSpPr>
+        <p:spPr>
+          <a:xfrm>
+            <a:off x="838200" y="1691640"/>
+            <a:ext cx="10515600" cy="4485640"/>
+          </a:xfrm>
+        </p:spPr>
+        <p:txBody>
+          <a:bodyPr anchor="ctr" anchorCtr="0"/>
+          <a:p>
+            <a:pPr>
+              <a:lnSpc>
+                <a:spcPct val="120000"/>
+              </a:lnSpc>
+              <a:spcAft>
+                <a:spcPts val="0"/>
+              </a:spcAft>
+              <a:buFont typeface="Arial" panose="020B0604020202020204" pitchFamily="34" charset="0"/>
+              <a:buChar char="•"/>
+            </a:pPr>
+            <a:r>
+              <a:rPr lang="en-US" altLang="en-GB">
+                <a:latin typeface="Times New Roman" panose="02020603050405020304" charset="0"/>
+                <a:cs typeface="Times New Roman" panose="02020603050405020304" charset="0"/>
+              </a:rPr>
+              <a:t>XGBoost achieved best historical accuracy (MAE ≈ 9.6)</a:t>
+            </a:r>
+            <a:endParaRPr lang="en-US" altLang="en-GB">
+              <a:latin typeface="Times New Roman" panose="02020603050405020304" charset="0"/>
+              <a:cs typeface="Times New Roman" panose="02020603050405020304" charset="0"/>
+            </a:endParaRPr>
+          </a:p>
+          <a:p>
+            <a:pPr>
+              <a:lnSpc>
+                <a:spcPct val="120000"/>
+              </a:lnSpc>
+              <a:spcAft>
+                <a:spcPts val="0"/>
+              </a:spcAft>
+              <a:buFont typeface="Arial" panose="020B0604020202020204" pitchFamily="34" charset="0"/>
+              <a:buChar char="•"/>
+            </a:pPr>
+            <a:r>
+              <a:rPr lang="en-US" altLang="en-GB">
+                <a:latin typeface="Times New Roman" panose="02020603050405020304" charset="0"/>
+                <a:cs typeface="Times New Roman" panose="02020603050405020304" charset="0"/>
+              </a:rPr>
+              <a:t>Strong impact of feature engineering (lags, rolling stats, external variables)</a:t>
+            </a:r>
+            <a:endParaRPr lang="en-US" altLang="en-GB">
+              <a:latin typeface="Times New Roman" panose="02020603050405020304" charset="0"/>
+              <a:cs typeface="Times New Roman" panose="02020603050405020304" charset="0"/>
+            </a:endParaRPr>
+          </a:p>
+          <a:p>
+            <a:pPr>
+              <a:lnSpc>
+                <a:spcPct val="120000"/>
+              </a:lnSpc>
+              <a:spcAft>
+                <a:spcPts val="0"/>
+              </a:spcAft>
+              <a:buFont typeface="Arial" panose="020B0604020202020204" pitchFamily="34" charset="0"/>
+              <a:buChar char="•"/>
+            </a:pPr>
+            <a:r>
+              <a:rPr lang="en-US" altLang="en-GB">
+                <a:latin typeface="Times New Roman" panose="02020603050405020304" charset="0"/>
+                <a:cs typeface="Times New Roman" panose="02020603050405020304" charset="0"/>
+              </a:rPr>
+              <a:t>Electricity prices show clear temporal patterns + high volatility</a:t>
+            </a:r>
+            <a:endParaRPr lang="en-US" altLang="en-GB">
+              <a:latin typeface="Times New Roman" panose="02020603050405020304" charset="0"/>
+              <a:cs typeface="Times New Roman" panose="02020603050405020304" charset="0"/>
+            </a:endParaRPr>
+          </a:p>
+          <a:p>
+            <a:pPr>
+              <a:lnSpc>
+                <a:spcPct val="120000"/>
+              </a:lnSpc>
+              <a:spcAft>
+                <a:spcPts val="0"/>
+              </a:spcAft>
+              <a:buFont typeface="Arial" panose="020B0604020202020204" pitchFamily="34" charset="0"/>
+              <a:buChar char="•"/>
+            </a:pPr>
+            <a:r>
+              <a:rPr lang="en-US" altLang="en-GB">
+                <a:latin typeface="Times New Roman" panose="02020603050405020304" charset="0"/>
+                <a:cs typeface="Times New Roman" panose="02020603050405020304" charset="0"/>
+              </a:rPr>
+              <a:t>In real forecasting, performance drops due to unavailable future inputs</a:t>
+            </a:r>
+            <a:endParaRPr lang="en-US" altLang="en-GB">
+              <a:latin typeface="Times New Roman" panose="02020603050405020304" charset="0"/>
+              <a:cs typeface="Times New Roman" panose="02020603050405020304" charset="0"/>
+            </a:endParaRPr>
+          </a:p>
+          <a:p>
+            <a:pPr>
+              <a:lnSpc>
+                <a:spcPct val="120000"/>
+              </a:lnSpc>
+              <a:spcAft>
+                <a:spcPts val="0"/>
+              </a:spcAft>
+              <a:buFont typeface="Arial" panose="020B0604020202020204" pitchFamily="34" charset="0"/>
+              <a:buChar char="•"/>
+            </a:pPr>
+            <a:r>
+              <a:rPr lang="en-US" altLang="en-GB">
+                <a:latin typeface="Times New Roman" panose="02020603050405020304" charset="0"/>
+                <a:cs typeface="Times New Roman" panose="02020603050405020304" charset="0"/>
+              </a:rPr>
+              <a:t>Prophet provides more realistic forecasts under these constraints</a:t>
+            </a:r>
+            <a:endParaRPr lang="en-US" altLang="en-GB">
+              <a:latin typeface="Times New Roman" panose="02020603050405020304" charset="0"/>
+              <a:cs typeface="Times New Roman" panose="02020603050405020304" charset="0"/>
+            </a:endParaRPr>
+          </a:p>
+        </p:txBody>
+      </p:sp>
+    </p:spTree>
+  </p:cSld>
+  <p:clrMapOvr>
+    <a:masterClrMapping/>
+  </p:clrMapOvr>
+</p:sld>
+</file>
+
+<file path=ppt/slides/slide19.xml><?xml version="1.0" encoding="utf-8"?>
+<p:sld xmlns:a="http://schemas.openxmlformats.org/drawingml/2006/main" xmlns:r="http://schemas.openxmlformats.org/officeDocument/2006/relationships" xmlns:p="http://schemas.openxmlformats.org/presentationml/2006/main">
+  <p:cSld>
+    <p:spTree>
+      <p:nvGrpSpPr>
+        <p:cNvPr id="1" name=""/>
+        <p:cNvGrpSpPr/>
+        <p:nvPr/>
+      </p:nvGrpSpPr>
+      <p:grpSpPr/>
+      <p:sp>
+        <p:nvSpPr>
+          <p:cNvPr id="2" name="Title 1"/>
+          <p:cNvSpPr>
+            <a:spLocks noGrp="1"/>
+          </p:cNvSpPr>
+          <p:nvPr>
+            <p:ph type="title"/>
+          </p:nvPr>
+        </p:nvSpPr>
+        <p:spPr/>
+        <p:txBody>
+          <a:bodyPr/>
+          <a:p>
+            <a:pPr algn="ctr"/>
+            <a:r>
+              <a:rPr lang="en-US" altLang="en-GB" sz="5200" b="1">
+                <a:solidFill>
+                  <a:schemeClr val="tx2">
+                    <a:lumMod val="75000"/>
+                  </a:schemeClr>
+                </a:solidFill>
+                <a:latin typeface="Times New Roman" panose="02020603050405020304" charset="0"/>
+                <a:cs typeface="Times New Roman" panose="02020603050405020304" charset="0"/>
+              </a:rPr>
+              <a:t>Future Work</a:t>
+            </a:r>
+            <a:endParaRPr lang="en-US" altLang="en-GB" sz="5200" b="1">
+              <a:solidFill>
+                <a:schemeClr val="tx2">
+                  <a:lumMod val="75000"/>
+                </a:schemeClr>
+              </a:solidFill>
+              <a:latin typeface="Times New Roman" panose="02020603050405020304" charset="0"/>
+              <a:cs typeface="Times New Roman" panose="02020603050405020304" charset="0"/>
+            </a:endParaRPr>
+          </a:p>
+        </p:txBody>
+      </p:sp>
+      <p:sp>
+        <p:nvSpPr>
+          <p:cNvPr id="3" name="Content Placeholder 2"/>
+          <p:cNvSpPr>
+            <a:spLocks noGrp="1"/>
+          </p:cNvSpPr>
+          <p:nvPr>
+            <p:ph idx="1"/>
+          </p:nvPr>
+        </p:nvSpPr>
+        <p:spPr>
+          <a:xfrm>
+            <a:off x="838200" y="1691005"/>
+            <a:ext cx="10515600" cy="4486275"/>
+          </a:xfrm>
+        </p:spPr>
+        <p:txBody>
+          <a:bodyPr anchor="ctr" anchorCtr="0"/>
+          <a:p>
+            <a:pPr>
+              <a:lnSpc>
+                <a:spcPct val="120000"/>
+              </a:lnSpc>
+              <a:spcAft>
+                <a:spcPts val="0"/>
+              </a:spcAft>
+            </a:pPr>
+            <a:r>
+              <a:rPr lang="en-US" altLang="en-GB">
+                <a:latin typeface="Times New Roman" panose="02020603050405020304" charset="0"/>
+                <a:cs typeface="Times New Roman" panose="02020603050405020304" charset="0"/>
+              </a:rPr>
+              <a:t>Use forecasted external variables (load, wind, solar)</a:t>
+            </a:r>
+            <a:endParaRPr lang="en-US" altLang="en-GB">
+              <a:latin typeface="Times New Roman" panose="02020603050405020304" charset="0"/>
+              <a:cs typeface="Times New Roman" panose="02020603050405020304" charset="0"/>
+            </a:endParaRPr>
+          </a:p>
+          <a:p>
+            <a:pPr>
+              <a:lnSpc>
+                <a:spcPct val="120000"/>
+              </a:lnSpc>
+              <a:spcAft>
+                <a:spcPts val="0"/>
+              </a:spcAft>
+            </a:pPr>
+            <a:r>
+              <a:rPr lang="en-US" altLang="en-GB">
+                <a:latin typeface="Times New Roman" panose="02020603050405020304" charset="0"/>
+                <a:cs typeface="Times New Roman" panose="02020603050405020304" charset="0"/>
+              </a:rPr>
+              <a:t>Explore hybrid models (ML + time-series)</a:t>
+            </a:r>
+            <a:endParaRPr lang="en-US" altLang="en-GB">
+              <a:latin typeface="Times New Roman" panose="02020603050405020304" charset="0"/>
+              <a:cs typeface="Times New Roman" panose="02020603050405020304" charset="0"/>
+            </a:endParaRPr>
+          </a:p>
+          <a:p>
+            <a:pPr>
+              <a:lnSpc>
+                <a:spcPct val="120000"/>
+              </a:lnSpc>
+              <a:spcAft>
+                <a:spcPts val="0"/>
+              </a:spcAft>
+            </a:pPr>
+            <a:r>
+              <a:rPr lang="en-US" altLang="en-GB">
+                <a:latin typeface="Times New Roman" panose="02020603050405020304" charset="0"/>
+                <a:cs typeface="Times New Roman" panose="02020603050405020304" charset="0"/>
+              </a:rPr>
+              <a:t>Improve modeling of price spikes / extreme events</a:t>
+            </a:r>
+            <a:endParaRPr lang="en-US" altLang="en-GB">
+              <a:latin typeface="Times New Roman" panose="02020603050405020304" charset="0"/>
+              <a:cs typeface="Times New Roman" panose="02020603050405020304" charset="0"/>
+            </a:endParaRPr>
+          </a:p>
+          <a:p>
+            <a:pPr>
+              <a:lnSpc>
+                <a:spcPct val="120000"/>
+              </a:lnSpc>
+              <a:spcAft>
+                <a:spcPts val="0"/>
+              </a:spcAft>
+            </a:pPr>
+            <a:r>
+              <a:rPr lang="en-US" altLang="en-GB">
+                <a:latin typeface="Times New Roman" panose="02020603050405020304" charset="0"/>
+                <a:cs typeface="Times New Roman" panose="02020603050405020304" charset="0"/>
+              </a:rPr>
+              <a:t>Incorporate additional signals (weather, imports/exports)</a:t>
+            </a:r>
+            <a:endParaRPr lang="en-US" altLang="en-GB">
+              <a:latin typeface="Times New Roman" panose="02020603050405020304" charset="0"/>
+              <a:cs typeface="Times New Roman" panose="02020603050405020304" charset="0"/>
+            </a:endParaRPr>
+          </a:p>
+          <a:p>
+            <a:pPr>
+              <a:lnSpc>
+                <a:spcPct val="120000"/>
+              </a:lnSpc>
+              <a:spcAft>
+                <a:spcPts val="0"/>
+              </a:spcAft>
+            </a:pPr>
+            <a:r>
+              <a:rPr lang="en-US" altLang="en-GB">
+                <a:latin typeface="Times New Roman" panose="02020603050405020304" charset="0"/>
+                <a:cs typeface="Times New Roman" panose="02020603050405020304" charset="0"/>
+              </a:rPr>
+              <a:t>Try probabilistic forecasting instead of point predictions</a:t>
+            </a:r>
+            <a:endParaRPr lang="en-US" altLang="en-GB">
               <a:latin typeface="Times New Roman" panose="02020603050405020304" charset="0"/>
               <a:cs typeface="Times New Roman" panose="02020603050405020304" charset="0"/>
             </a:endParaRPr>
@@ -5131,6 +5318,82 @@
           </a:prstGeom>
         </p:spPr>
       </p:pic>
+    </p:spTree>
+  </p:cSld>
+  <p:clrMapOvr>
+    <a:masterClrMapping/>
+  </p:clrMapOvr>
+</p:sld>
+</file>
+
+<file path=ppt/slides/slide20.xml><?xml version="1.0" encoding="utf-8"?>
+<p:sld xmlns:a="http://schemas.openxmlformats.org/drawingml/2006/main" xmlns:r="http://schemas.openxmlformats.org/officeDocument/2006/relationships" xmlns:p="http://schemas.openxmlformats.org/presentationml/2006/main">
+  <p:cSld>
+    <p:spTree>
+      <p:nvGrpSpPr>
+        <p:cNvPr id="1" name=""/>
+        <p:cNvGrpSpPr/>
+        <p:nvPr/>
+      </p:nvGrpSpPr>
+      <p:grpSpPr/>
+      <p:sp>
+        <p:nvSpPr>
+          <p:cNvPr id="2" name="Title 1"/>
+          <p:cNvSpPr>
+            <a:spLocks noGrp="1"/>
+          </p:cNvSpPr>
+          <p:nvPr>
+            <p:ph type="title"/>
+          </p:nvPr>
+        </p:nvSpPr>
+        <p:spPr>
+          <a:xfrm>
+            <a:off x="838200" y="2766060"/>
+            <a:ext cx="10515600" cy="1325563"/>
+          </a:xfrm>
+        </p:spPr>
+        <p:txBody>
+          <a:bodyPr/>
+          <a:p>
+            <a:pPr algn="ctr"/>
+            <a:r>
+              <a:rPr lang="en-US" altLang="en-GB" sz="8000" b="1">
+                <a:solidFill>
+                  <a:schemeClr val="tx2">
+                    <a:lumMod val="75000"/>
+                  </a:schemeClr>
+                </a:solidFill>
+                <a:effectLst>
+                  <a:outerShdw blurRad="38100" dist="38100" dir="2700000" algn="tl">
+                    <a:srgbClr val="000000">
+                      <a:alpha val="43137"/>
+                    </a:srgbClr>
+                  </a:outerShdw>
+                </a:effectLst>
+                <a:latin typeface="Times New Roman" panose="02020603050405020304" charset="0"/>
+                <a:cs typeface="Times New Roman" panose="02020603050405020304" charset="0"/>
+              </a:rPr>
+              <a:t>Thank You</a:t>
+            </a:r>
+            <a:endParaRPr lang="en-US" altLang="en-GB" sz="8000" b="1">
+              <a:solidFill>
+                <a:schemeClr val="tx2">
+                  <a:lumMod val="75000"/>
+                </a:schemeClr>
+              </a:solidFill>
+              <a:effectLst>
+                <a:outerShdw blurRad="38100" dist="38100" dir="2700000" algn="tl">
+                  <a:srgbClr val="000000">
+                    <a:alpha val="43137"/>
+                  </a:srgbClr>
+                </a:outerShdw>
+              </a:effectLst>
+              <a:latin typeface="Times New Roman" panose="02020603050405020304" charset="0"/>
+              <a:cs typeface="Times New Roman" panose="02020603050405020304" charset="0"/>
+            </a:endParaRPr>
+          </a:p>
+        </p:txBody>
+      </p:sp>
     </p:spTree>
   </p:cSld>
   <p:clrMapOvr>
